--- a/project_presentation.pptx
+++ b/project_presentation.pptx
@@ -259,7 +259,7 @@
       <p15:sldGuideLst xmlns:p15="http://schemas.microsoft.com/office/powerpoint/2012/main"/>
     </p:ext>
     <p:ext uri="GoogleSlidesCustomDataVersion2">
-      <go:slidesCustomData xmlns="" xmlns:go="http://customooxmlschemas.google.com/" xmlns:ahyp="http://schemas.microsoft.com/office/drawing/2018/hyperlinkcolor" xmlns:p15="http://schemas.microsoft.com/office/powerpoint/2012/main" xmlns:p14="http://schemas.microsoft.com/office/powerpoint/2010/main" xmlns:com="http://schemas.openxmlformats.org/drawingml/2006/compatibility" xmlns:pvml="urn:schemas-microsoft-com:office:powerpoint" xmlns:v="urn:schemas-microsoft-com:vml" xmlns:o="urn:schemas-microsoft-com:office:office" xmlns:dgm="http://schemas.openxmlformats.org/drawingml/2006/diagram" xmlns:c="http://schemas.openxmlformats.org/drawingml/2006/chart" xmlns:mv="urn:schemas-microsoft-com:mac:vml" xmlns:mc="http://schemas.openxmlformats.org/markup-compatibility/2006" r:id="rId27" roundtripDataSignature="AMtx7mjt3491jQ7aCoyIz2WXeHKroE7tpQ=="/>
+      <go:slidesCustomData xmlns:mc="http://schemas.openxmlformats.org/markup-compatibility/2006" xmlns:mv="urn:schemas-microsoft-com:mac:vml" xmlns:c="http://schemas.openxmlformats.org/drawingml/2006/chart" xmlns:dgm="http://schemas.openxmlformats.org/drawingml/2006/diagram" xmlns:o="urn:schemas-microsoft-com:office:office" xmlns:v="urn:schemas-microsoft-com:vml" xmlns:pvml="urn:schemas-microsoft-com:office:powerpoint" xmlns:com="http://schemas.openxmlformats.org/drawingml/2006/compatibility" xmlns:p14="http://schemas.microsoft.com/office/powerpoint/2010/main" xmlns:p15="http://schemas.microsoft.com/office/powerpoint/2012/main" xmlns:ahyp="http://schemas.microsoft.com/office/drawing/2018/hyperlinkcolor" xmlns:go="http://customooxmlschemas.google.com/" xmlns="" r:id="rId27" roundtripDataSignature="AMtx7mjt3491jQ7aCoyIz2WXeHKroE7tpQ=="/>
     </p:ext>
   </p:extLst>
 </p:presentation>
@@ -12605,7 +12605,7 @@
                 <a:cs typeface="Times New Roman"/>
                 <a:sym typeface="Times New Roman"/>
               </a:rPr>
-              <a:t>– https://github.com/yuvraj860-hue/code-reacher</a:t>
+              <a:t>– https://github.com/shubham9570/SciSeek</a:t>
             </a:r>
             <a:endParaRPr sz="1850" b="0" i="0" u="none" strike="noStrike" cap="none" dirty="0">
               <a:solidFill>
@@ -13054,7 +13054,7 @@
           <p:nvPr>
             <p:extLst>
               <p:ext uri="{D42A27DB-BD31-4B8C-83A1-F6EECF244321}">
-                <p14:modId xmlns:p14="http://schemas.microsoft.com/office/powerpoint/2010/main" val="2235515989"/>
+                <p14:modId xmlns:p14="http://schemas.microsoft.com/office/powerpoint/2010/main" val="4056323731"/>
               </p:ext>
             </p:extLst>
           </p:nvPr>
@@ -13485,7 +13485,7 @@
                       </a:pPr>
                       <a:r>
                         <a:rPr lang="en-IN" dirty="0"/>
-                        <a:t>Yuvraj Singh</a:t>
+                        <a:t>Shubham Kumar</a:t>
                       </a:r>
                     </a:p>
                   </a:txBody>
@@ -13545,7 +13545,7 @@
                         </a:spcAft>
                         <a:buNone/>
                       </a:pPr>
-                      <a:endParaRPr sz="1800"/>
+                      <a:endParaRPr sz="1800" dirty="0"/>
                     </a:p>
                   </a:txBody>
                   <a:tcPr marL="91450" marR="91450" marT="45725" marB="45725">
@@ -13630,7 +13630,7 @@
                       </a:pPr>
                       <a:r>
                         <a:rPr lang="en-IN" sz="1200" dirty="0"/>
-                        <a:t>yuvrajsingh45842@gmail.com</a:t>
+                        <a:t>shubham9570950kumar@gmail.com </a:t>
                       </a:r>
                       <a:endParaRPr sz="1200" dirty="0"/>
                     </a:p>
@@ -13717,7 +13717,7 @@
                       </a:pPr>
                       <a:r>
                         <a:rPr lang="en-IN" dirty="0"/>
-                        <a:t>+91 8603558113</a:t>
+                        <a:t>+91 7372091908</a:t>
                       </a:r>
                       <a:endParaRPr dirty="0"/>
                     </a:p>
@@ -13860,7 +13860,7 @@
                   <a:srgbClr val="FFFF00"/>
                 </a:highlight>
               </a:rPr>
-              <a:t>ResearchIQ</a:t>
+              <a:t>SciSeek</a:t>
             </a:r>
             <a:r>
               <a:rPr lang="en-IN" sz="2400" dirty="0">
@@ -13907,8 +13907,8 @@
         </p:blipFill>
         <p:spPr>
           <a:xfrm>
-            <a:off x="4165504" y="3721122"/>
-            <a:ext cx="677608" cy="903477"/>
+            <a:off x="4169360" y="3721122"/>
+            <a:ext cx="669895" cy="903477"/>
           </a:xfrm>
           <a:prstGeom prst="rect">
             <a:avLst/>
